--- a/slides/study-legged/study-legged.pptx
+++ b/slides/study-legged/study-legged.pptx
@@ -748,7 +748,7 @@
           <a:lstStyle/>
           <a:p>
             <a:r>
-              <a:t>둘째 장은 지형을 보며 걷는 정책이다. 먼저 이 분야의 기본 학습 절차인 교사–학생 증류를 보고, 볼 곳을 고르는 연구, 머리의 LiDAR 하나로 걷는 연구, 깊이 영상으로 파쿠르를 하는 연구, 처음 보는 몸에 적응하는 연구를 본다.</a:t>
+              <a:t>둘째 장은 지형을 보며 걷는 정책이다. 먼저 이 분야의 기본 학습 절차인 teacher–student 증류를 보고, 볼 곳을 고르는 연구, 머리의 LiDAR 하나로 걷는 연구, 깊이 영상으로 파쿠르를 하는 연구, 처음 보는 몸에 적응하는 연구를 살펴본다.</a:t>
             </a:r>
           </a:p>
         </p:txBody>
@@ -818,7 +818,7 @@
           <a:lstStyle/>
           <a:p>
             <a:r>
-              <a:t>다리 로봇의 지형 인식 보행은 거의 모두 이 절차를 쓴다. 센서가 잡음 섞인 높이 지도나 깊이 영상만 볼 때 처음부터 RL로 배우기는 어렵다. 그래서 먼저 시뮬의 정답 지형을 보는 교사를 배운다. 이것은 완전 관측 문제라 RL이 잘 푼다. 그다음 학생이 실제 센서 관측과 이력만 보고 교사의 행동을 따라 하게 한다. 학생이 굴린 상태에서 교사에게 라벨을 받는 DAgger가 분포 이동을 막는다. 증류 가중을 너무 빨리 끄면 학생 행동이 떨리는 경우가 보고됐다.</a:t>
+              <a:t>다리 로봇의 지형 인식 보행은 거의 모두 이 절차를 쓴다. 센서가 잡음 섞인 높이 지도나 깊이 영상만 볼 때 처음부터 RL로 배우기는 어렵다. 그래서 먼저 시뮬의 정답 지형을 보는 교사를 배운다. 이것은 완전 관측 문제라 RL이 잘 푼다. 그다음 학생이 실제 센서 관측과 이력만 보고 교사의 행동을 따라 하게 한다. 학생이 rollout한 상태에서 교사에게 라벨을 받는 DAgger가 분포 이동을 막는다. 증류 손실을 너무 빨리 끄면 학생 행동이 떨리는 경우가 보고됐다.</a:t>
             </a:r>
           </a:p>
         </p:txBody>
@@ -888,7 +888,7 @@
           <a:lstStyle/>
           <a:p>
             <a:r>
-              <a:t>이 연구는 정책이 볼 지형을 크게 줄였다. 작은 예측기가 몸의 감각만으로 다음 두 발이 어디 닿을지 예측하고, 정책은 그 두 곳 둘레의 작은 조각만 본다. 학습이 몇 배 빨랐고 디딜 곳이 드문 지형에서 강했다. 중요한 대조는 같은 수의 높이를 로봇 앞 고정 격자에서 뽑으면 오히려 나빠졌다는 것이다. 바퀴 로봇이라면 곧 지날 바닥이 발 디딤에 해당한다. 다만 볼 곳을 좁히면 옆에서 오는 장애물을 늦게 보므로, 동적 장애물은 넓은 시야로 따로 받아야 한다.</a:t>
+              <a:t>이 연구는 정책이 볼 지형을 크게 줄였다. 작은 예측기가 몸의 감각만으로 다음 두 발이 어디 닿을지 예측하고, 정책은 그 두 곳 둘레의 작은 조각만 본다. 학습이 몇 배 빨랐고 디딜 곳이 드문 지형에서 강했다. 중요한 대조는 같은 수의 높이를 로봇 앞 고정 격자에서 뽑으면 오히려 나빠졌다는 것이다. 바퀴 로봇이라면 곧 지날 바닥이 foothold에 해당한다. 다만 볼 곳을 좁히면 옆에서 오는 장애물을 늦게 보므로, 동적 장애물은 넓은 시야로 따로 받아야 한다.</a:t>
             </a:r>
           </a:p>
         </p:txBody>
@@ -1028,7 +1028,7 @@
           <a:lstStyle/>
           <a:p>
             <a:r>
-              <a:t>이 연구는 사람의 파쿠르를 휴머노이드로 옮겼다. 핵심은 데이터다. 게임 애니메이션에서 쓰는 motion matching으로 기술 사이를 보행으로 이어 긴 학습 궤적을 만든다. 배포 정책은 고유감각, 깊이 영상, 이산 2D 속도 명령만 본다. 경계로 보면 속도 계약이지만, 아래 층이 매우 강력해서 벽 오르기까지 스스로 판단한다. 교사–학생 증류의 실무 요령도 하나 보여 준다. 증류 손실을 완전히 끄지 말고 작게 남겨야 한다.</a:t>
+              <a:t>이 연구는 사람의 파쿠르를 휴머노이드로 옮겼다. 핵심은 데이터다. 게임 애니메이션에서 쓰는 motion matching으로 기술 사이를 보행으로 이어 긴 학습 궤적을 만든다. 배포 정책은 proprioception, 깊이 영상, 이산 2D 속도 명령만 본다. 경계로 보면 속도 계약이지만, 아래 층이 매우 강력해서 벽 오르기까지 스스로 판단한다. teacher–student 증류의 실무 요령도 하나 보여 준다. 증류 손실을 완전히 끄지 말고 작게 남겨야 한다.</a:t>
             </a:r>
           </a:p>
         </p:txBody>
@@ -1098,7 +1098,7 @@
           <a:lstStyle/>
           <a:p>
             <a:r>
-              <a:t>LocoFormer는 몸 정보를 입력으로 받지 않는다. 관절 수, 길이, 질량을 모르고, 몇 초의 경험으로 몸을 알아낸다. 그러려면 학습 때 정말 다양한 몸을 봐야 한다. 무작위로 만든 로봇 10만 대가 그 역할을 한다. 또 한 에피소드 안에서 여러 번 시도하게 하고 기억을 시도 사이에 넘기므로, 넘어진 시도를 기억해 다음 시도를 고친다. 제어 덱에서 본 RMA의 "이력에서 숨은 조건 추정"을 몸 전체로 넓힌 것이다.</a:t>
+              <a:t>LocoFormer는 몸(embodiment) 정보를 입력으로 받지 않는다. 관절 수, 길이, 질량을 모르고, 몇 초의 경험으로 몸을 알아낸다. 그러려면 학습 때 정말 다양한 몸을 봐야 한다. 무작위로 만든 로봇 10만 대가 그 역할을 한다. 또 한 에피소드 안에서 여러 번 시도하게 하고 기억을 시도 사이에 넘기므로, 넘어진 시도를 기억해 다음 시도를 고친다. 제어 덱에서 본 RMA의 "이력에서 숨은 조건 추정"을 몸 전체로 넓힌 것이다.</a:t>
             </a:r>
           </a:p>
         </p:txBody>
@@ -1238,7 +1238,7 @@
           <a:lstStyle/>
           <a:p>
             <a:r>
-              <a:t>셋째 장은 휴머노이드의 전신 제어다. 사람 동작 데이터를 로봇에 옮기는 리타기팅, 장면에 맞춘 사람 동작으로 계획기를 배우는 연구, 평지 동작을 지형에 맞추는 원격조종 연구, 그리고 학습 정책의 출력을 실행 가능한 집합으로 투영하는 연구를 본다.</a:t>
+              <a:t>셋째 장은 휴머노이드의 전신 제어다. 사람 동작 데이터를 로봇에 옮기는 리타기팅, 장면에 맞춘 사람 동작으로 플래너를 배우는 연구, 평지 동작을 지형에 맞추는 원격조종 연구, 그리고 학습 정책의 출력을 실행 가능한 집합으로 투영하는 연구를 다룬다.</a:t>
             </a:r>
           </a:p>
         </p:txBody>
@@ -1448,7 +1448,7 @@
           <a:lstStyle/>
           <a:p>
             <a:r>
-              <a:t>이 연구는 보상을 손으로 짜는 대신, 사람이 VR 안에서 장애물을 지나간 동작을 모았다. 위 층은 flow matching 계획기로 짧은 미래의 전신 기준 동작을 생성하고, 아래 층의 범용 추종기가 그것을 관절 명령으로 바꾼다. 경계는 "기준 동작"이다. 계획 덱에서 본 생성형 Planner와 같은 구조를 휴머노이드 규모로 키운 셈이다. 빼기 실험은 생성 계획기를 실제로 쓸 때 무엇이 빠지면 안 되는지 알려 준다.</a:t>
+              <a:t>이 연구는 보상을 손으로 설계하는 대신, 사람이 VR 안에서 장애물을 지나간 동작을 모았다. 위 층은 flow matching 플래너로 짧은 미래의 전신 기준 동작을 생성하고, 아래 층의 범용 추종기가 그것을 관절 명령으로 바꾼다. 경계는 "기준 동작"이다. 계획 덱에서 본 생성형 Planner와 같은 구조를 휴머노이드 규모로 키운 셈이다. ablation은 생성 플래너를 실제로 쓸 때 무엇이 빠지면 안 되는지 알려 준다.</a:t>
             </a:r>
           </a:p>
         </p:txBody>
@@ -1518,7 +1518,7 @@
           <a:lstStyle/>
           <a:p>
             <a:r>
-              <a:t>NEXUS는 원격조종용 전신 추종기다. 운영자가 평지에서 움직이면 로봇은 계단과 경사 위에서 같은 동작을 한다. 핵심은 짝 데이터를 자동으로 만드는 방법이다. 평지에서 잡은 동작에서 손발이 닿는 순간을 찾아, 그 자리의 지형 높이에 맞게 골반과 팔다리를 고친다. 그 데이터로 높이 지도를 보는 교사를 배우고 깊이 영상만 보는 학생에게 옮긴다. 위 층은 지형을 몰라도 되고, 아래 층이 국소 인식으로 맞춘다는 점에서 내비게이션의 Planner–Controller 분리와 같은 계약이다.</a:t>
+              <a:t>NEXUS는 원격조종용 전신 추종기다. 운영자가 평지에서 움직이면 로봇은 계단과 경사 위에서 같은 동작을 한다. 핵심은 쌍 데이터를 자동으로 만드는 방법이다. 평지에서 잡은 동작에서 손발이 닿는 순간을 찾아, 그 자리의 지형 높이에 맞게 골반과 팔다리를 고친다. 그 데이터로 높이 지도를 보는 교사를 배우고 깊이 영상만 보는 학생에게 옮긴다. 위 층은 지형을 몰라도 되고, 아래 층이 국소 인식으로 맞춘다는 점에서 내비게이션의 Planner–Controller 분리와 같은 계약이다.</a:t>
             </a:r>
           </a:p>
         </p:txBody>
@@ -1588,7 +1588,7 @@
           <a:lstStyle/>
           <a:p>
             <a:r>
-              <a:t>학습한 정책이 낸 명령을 그대로 실행하면 동역학, 접촉, 학습 분포 가운데 하나를 어길 수 있다. 최근 연구는 실행 직전에 출력을 해낼 수 있는 집합으로 옮긴다. 투영하는 공간이 연구마다 다르다. 동역학이 맞는 변수로 옮기거나, 정책이 숙련된 잠재 영역 안으로 줄이거나, 여러 기술을 공통 잠재로 옮긴다. 바퀴 로봇에서도 같은 문제가 있다. 예를 들어 조향 각도에 한계가 있는 바퀴는 낼 수 있는 속도 방향이 원뿔 모양으로 제한되고, 그 밖의 명령은 가장 가까운 실행 가능한 명령으로 투영해야 한다.</a:t>
+              <a:t>학습한 정책이 낸 명령을 그대로 실행하면 동역학, 접촉, 학습 분포 가운데 하나를 어길 수 있다. 최근 연구는 실행 직전에 출력을 해낼 수 있는 집합으로 옮긴다. 투영하는 공간이 연구마다 다르다. 동역학이 맞는 변수로 옮기거나, 정책이 숙련된 latent 영역 안으로 줄이거나, 여러 기술을 공통 latent로 옮긴다. 바퀴 로봇에서도 같은 문제가 있다. 예를 들어 조향 각도에 한계가 있는 바퀴는 낼 수 있는 속도 방향이 원뿔 모양으로 제한되고, 그 밖의 명령은 가장 가까운 실행 가능한 명령으로 투영해야 한다.</a:t>
             </a:r>
           </a:p>
         </p:txBody>
@@ -1658,7 +1658,7 @@
           <a:lstStyle/>
           <a:p>
             <a:r>
-              <a:t>전신 제어 연구는 대부분 사람 데이터에서 출발한다. 사람의 동작은 자연스럽고 다양하지만 로봇이 그대로 해낼 수는 없다. 그 틈을 계획기가 장면에 맞게 생성하며 메우거나, 추종기가 국소 인식으로 메우거나, 실행 직전에 투영으로 메우거나, 층마다 RL로 메운다. 각 방법은 데이터 비용, 위 층의 부담, 안전 보장에서 맞바꾼다.</a:t>
+              <a:t>전신 제어 연구는 대부분 사람 데이터에서 출발한다. 사람의 동작은 자연스럽고 다양하지만 로봇이 그대로 해낼 수는 없다. 그 틈을 플래너가 장면에 맞게 생성하며 메우거나, 추종기가 국소 인식으로 메우거나, 실행 직전에 투영으로 메우거나, 층마다 RL로 메운다. 각 방법은 데이터 비용, 위 층의 부담, 안전 보장 사이에 트레이드오프가 있다.</a:t>
             </a:r>
           </a:p>
         </p:txBody>
@@ -1728,7 +1728,7 @@
           <a:lstStyle/>
           <a:p>
             <a:r>
-              <a:t>넷째 장은 몇 분에서 한 시간짜리 긴 작업이다. 왜 긴 작업은 단계 신뢰도에 극도로 민감한지 보고, 두 회사의 세 층 구조를 본다. 두 사례 모두 논문이 아닌 회사 발표라는 점을 함께 기억하자.</a:t>
+              <a:t>넷째 장은 몇 분에서 한 시간짜리 긴 작업이다. 왜 긴 작업은 단계 신뢰도에 극도로 민감한지 보고, 두 회사의 세 층 구조를 살펴본다. 두 사례 모두 논문이 아닌 회사 발표라는 점을 함께 기억하자.</a:t>
             </a:r>
           </a:p>
         </p:txBody>
@@ -1868,7 +1868,7 @@
           <a:lstStyle/>
           <a:p>
             <a:r>
-              <a:t>이 사례의 새로운 점은 강화학습을 운동 기술에만 쓰지 않고 맨 위 임무 언어 모델까지 넓혔다는 것이다. 기성 언어 모델은 앞 도구 호출이 정말 끝났는지 확인하지 않고 그럴듯한 다음 호출을 내는 버릇이 있는데, 이를 RL로 고쳤다고 한다. 실패는 두 단에서 받는다. 운동 층이 배운 복구 동작으로 먼저 다시 하고, 안 되면 언어 모델이 다시 계획한다. 회사 발표 수치라 독립 검증은 없다.</a:t>
+              <a:t>이 사례의 새로운 점은 강화학습을 운동 기술에만 쓰지 않고 맨 위 임무 언어 모델까지 넓혔다는 것이다. 기성 언어 모델은 앞 도구 호출이 정말 끝났는지 확인하지 않고 그럴듯한 다음 호출을 내는 버릇이 있는데, 이를 RL로 고쳤다고 한다. 실패는 두 층에서 처리한다. 운동 층이 배운 복구 동작으로 먼저 다시 하고, 안 되면 언어 모델이 다시 계획한다. 회사 발표 수치라 독립 검증은 없다.</a:t>
             </a:r>
           </a:p>
         </p:txBody>
@@ -1938,7 +1938,7 @@
           <a:lstStyle/>
           <a:p>
             <a:r>
-              <a:t>이 사례는 휴머노이드는 아니지만, 바퀴 바닥 위에 상체를 얹은 로봇이 실제 작업까지 간 예다. 층 나누기는 앞 사례와 비슷하다. 맨 위가 작업 흐름을 정하고, 가운데 행동 모델이 궤적을 내고, 맨 아래 전신 제어기가 따른다. 층 사이를 잇는 표현을 몸의 주요 지점 자세로 명시적으로 정한 것이 눈에 띈다. 그래야 층마다 따로 학습하고 바꿀 수 있다. 수치는 회사 발표라 같은 무게로 읽지 않는다.</a:t>
+              <a:t>이 사례는 휴머노이드는 아니지만, 바퀴 베이스 위에 상체를 얹은 로봇이 실제 작업까지 간 예다. 층 나누기는 앞 사례와 비슷하다. 맨 위가 작업 흐름을 정하고, 가운데 행동 모델이 궤적을 내고, 맨 아래 전신 제어기가 따른다. 층 사이를 잇는 표현을 몸의 주요 지점 자세로 명시적으로 정한 것이 눈에 띈다. 그래야 층마다 따로 학습하고 바꿀 수 있다. 수치는 회사 발표라 같은 무게로 읽지 않는다.</a:t>
             </a:r>
           </a:p>
         </p:txBody>
@@ -2078,7 +2078,7 @@
           <a:lstStyle/>
           <a:p>
             <a:r>
-              <a:t>마지막 덱이다. 다리 로봇은 인식의 높이 지도, 제어의 층 구조, 강화학습의 PPO와 증류, 시뮬레이션의 무작위화를 모두 쓴다. 그래서 앞의 여섯 덱을 본 뒤에 보면 각 연구가 어느 층을 바꿨는지 쉽게 읽힌다. 이 덱의 질문, 즉 층을 어디서 나누고 학습한 출력을 어떻게 실행 가능하게 만드느냐는 앞의 덱 전체를 다시 보는 틀이 되기도 한다. 일곱 덱 전체의 순서와 10주 계획은 로드맵 덱에 있다.</a:t>
+              <a:t>마지막 덱이다. 다리 로봇은 인식의 높이 지도, 제어의 층 구조, 강화학습의 PPO와 증류, 시뮬레이션의 도메인 랜덤화를 모두 쓴다. 그래서 앞의 여섯 덱을 본 뒤에 보면 각 연구가 어느 층을 바꿨는지 쉽게 읽힌다. 이 덱의 질문, 즉 층을 어디서 나누고 학습한 출력을 어떻게 실행 가능하게 만드느냐는 앞의 덱 전체를 다시 보는 틀이 되기도 한다. 일곱 덱 전체의 순서와 10주 계획은 로드맵 덱에 있다.</a:t>
             </a:r>
           </a:p>
         </p:txBody>
@@ -2288,7 +2288,7 @@
           <a:lstStyle/>
           <a:p>
             <a:r>
-              <a:t>복습용 표다. 각 줄의 양쪽은 맞바꿈이고, 문제와 검증 요구에 따라 고른다. 공통으로 권할 만한 것은 셋이다. 교사–학생 증류로 학습 절차를 안정시키고, 아래 층의 명령 추종 응답을 재서 위 층에 알려 주고, 실행 직전 투영이나 필터로 안전을 지키는 것이다.</a:t>
+              <a:t>복습용 표다. 각 줄의 양쪽은 트레이드오프이고, 문제와 검증 요구에 따라 고른다. 공통으로 권할 만한 것은 셋이다. teacher–student 증류로 학습 절차를 안정시키고, 아래 층의 명령 추종 응답을 재서 위 층에 알려 주고, 실행 직전 투영이나 필터로 안전을 지키는 것이다.</a:t>
             </a:r>
           </a:p>
         </p:txBody>
@@ -2428,7 +2428,7 @@
           <a:lstStyle/>
           <a:p>
             <a:r>
-              <a:t>다리 로봇 연구는 대부분 공통의 학습 절차 위에 서 있다. 대규모 병렬 시뮬에서 PPO로 배우고, 무작위화와 이력으로 적응하고, 교사–학생으로 지형 인식을 더한다. 이 세 논문을 먼저 읽고 공개 코드로 한 번 돌려 보면, 이후 논문들이 이 절차의 어디를 바꿨는지 쉽게 보인다. 그다음 이 덱의 두 질문, 경계와 실행 가능성으로 읽으면 된다.</a:t>
+              <a:t>다리 로봇 연구는 대부분 공통의 학습 절차 위에 서 있다. 대규모 병렬 시뮬에서 PPO로 배우고, 랜덤화와 이력으로 적응하고, teacher–student로 지형 인식을 더한다. 이 세 논문을 먼저 읽고 공개 코드로 한 번 돌려 보면, 이후 논문들이 이 절차의 어디를 바꿨는지 쉽게 보인다. 그다음 이 덱의 두 질문, 경계와 실행 가능성으로 읽으면 된다.</a:t>
             </a:r>
           </a:p>
         </p:txBody>
@@ -2498,7 +2498,7 @@
           <a:lstStyle/>
           <a:p>
             <a:r>
-              <a:t>오늘 본 것을 여섯 상자로 줄였다. 다리 로봇 내비게이션 연구는 두 질문으로 정리된다. 위 층은 무엇을 넘기는가, 아래 층은 그것을 해낼 수 있는가. 이 두 질문은 바퀴 로봇을 포함한 모든 계층형 로봇 시스템에 그대로 적용된다.</a:t>
+              <a:t>오늘 본 것을 여섯 카드로 줄였다. 다리 로봇 내비게이션 연구는 두 질문으로 정리된다. 위 층은 무엇을 넘기는가, 아래 층은 그것을 해낼 수 있는가. 이 두 질문은 바퀴 로봇을 포함한 모든 계층형 로봇 시스템에 그대로 적용된다.</a:t>
             </a:r>
           </a:p>
         </p:txBody>
@@ -2708,7 +2708,7 @@
           <a:lstStyle/>
           <a:p>
             <a:r>
-              <a:t>다리 로봇은 땅에 닿은 발이 만드는 지지 영역 안에 무게중심을 두거나, 그렇지 못하면 다음 발을 제때 놓아 균형을 잡는다. 4족의 걷기는 다리 셋이 땅에 있어 멈춰도 서 있지만, 속보나 이족 보행은 지지 영역이 선분이나 발 하나라 움직임으로 균형을 잡는다. 그래서 다리 로봇의 아래 층은 바퀴보다 훨씬 복잡하고, 지금은 대부분 시뮬레이터에서 강화학습으로 배운다. 몸 안의 감각과 몸 밖의 감각을 어떻게 섞을지도 핵심 설계다.</a:t>
+              <a:t>다리 로봇은 땅에 닿은 발이 만드는 지지 영역 안에 무게중심을 두거나, 그렇지 못하면 다음 발을 제때 놓아 균형을 잡는다. 4족의 걷기(walk)는 다리 셋이 땅에 있어 멈춰도 서 있지만, trot이나 이족 보행은 지지 영역이 선분이나 발 하나라 움직임으로 균형을 잡는다. 그래서 다리 로봇의 아래 층은 바퀴보다 훨씬 복잡하고, 지금은 대부분 시뮬레이터에서 강화학습으로 배운다. 몸 안의 감각과 몸 밖의 감각을 어떻게 섞을지도 핵심 설계다.</a:t>
             </a:r>
           </a:p>
         </p:txBody>
@@ -2848,7 +2848,7 @@
           <a:lstStyle/>
           <a:p>
             <a:r>
-              <a:t>첫째 장은 위 층과 아래 층 사이의 계약이다. 가장 흔한 계약인 몸체 속도부터, 경계를 보행 정책 쪽으로 내린 연구, 아예 하나의 정책으로 합친 연구까지 본다.</a:t>
+              <a:t>첫째 장은 위 층과 아래 층 사이의 계약이다. 가장 흔한 계약인 몸체 속도부터, 경계를 보행 정책 쪽으로 내린 연구, 아예 하나의 정책으로 합친 연구까지 다룬다.</a:t>
             </a:r>
           </a:p>
         </p:txBody>
@@ -2988,7 +2988,7 @@
           <a:lstStyle/>
           <a:p>
             <a:r>
-              <a:t>CMU가 공개한 자율 스택은 "내비 층은 몸체를 몰라도 된다"는 설계의 좋은 예다. 바퀴든 다리든, 내비 층은 몸체 속도와 회전 속도만 넘기고 걸음새는 아래 층이 알아서 한다. 이 계약은 단순하고 바꿔 끼우기 쉽지만, 아래 층이 명령을 늦게, 혹은 일부만 따른다는 사실을 무시한다. 학습한 보행 정책은 명령을 그대로 따르지 않는 경우가 많아서, 그 응답을 재서 위 층의 예측 모델에 넣는 단계가 필요하다.</a:t>
+              <a:t>CMU가 공개한 자율 스택은 "내비 층은 몸체를 몰라도 된다"는 설계의 좋은 예다. 바퀴든 다리든, 내비 층은 몸체 속도와 회전 속도만 넘기고 gait는 아래 층이 알아서 한다. 이 계약은 단순하고 바꿔 끼우기 쉽지만, 아래 층이 명령을 늦게, 혹은 일부만 따른다는 사실을 무시한다. 학습한 보행 정책은 명령을 그대로 따르지 않는 경우가 많아서, 그 응답을 재서 위 층의 예측 모델에 넣는 단계가 필요하다.</a:t>
             </a:r>
           </a:p>
         </p:txBody>
@@ -3058,7 +3058,7 @@
           <a:lstStyle/>
           <a:p>
             <a:r>
-              <a:t>두 연구는 경계를 속도 계약보다 아래로 내렸다. LP-NavOA는 보행 정책을 먼저 학습해 얼린 뒤, 그 위의 작은 순환 Planner가 진행 방향 명령만 덮어쓴다. 아래 층의 능력을 해치지 않으면서 위 층을 학습할 수 있다. FocusNav는 waypoint를 정책 안에서 예측하고 그 둘레의 지도만 본다. 경계가 정책 안으로 들어간 것이다. 같은 연구진의 GLAD는 명시적 Planner 없이 전진 명령만으로 좁은 길을 따라갔다고 보고한다.</a:t>
+              <a:t>두 연구는 경계를 속도 계약보다 아래로 내렸다. LP-NavOA는 보행 정책을 먼저 학습해 고정한 뒤, 그 위의 작은 recurrent Planner가 진행 방향 명령만 덮어쓴다. 아래 층의 능력을 해치지 않으면서 위 층을 학습할 수 있다. FocusNav는 waypoint를 정책 안에서 예측하고 그 둘레의 지도만 본다. 경계가 정책 안으로 들어간 것이다. 같은 연구진의 GLAD는 명시적 Planner 없이 전진 명령만으로 좁은 길을 따라갔다고 보고한다.</a:t>
             </a:r>
           </a:p>
         </p:txBody>
@@ -6208,7 +6208,7 @@
                 <a:ea typeface="Malgun Gothic"/>
                 <a:cs typeface="Malgun Gothic"/>
               </a:rPr>
-              <a:t>층 사이의 경계, 지형을 보는 보행, 교사–학생 증류, 사람 동작에서 전신 제어, 출력 투영, 긴 작업의 신뢰도 — 휴머노이드·4족 내비게이션을 그림과 장단점으로</a:t>
+              <a:t>층 사이의 경계, 지형을 보는 보행, teacher–student 증류, 사람 동작에서 전신 제어, 출력 투영, 긴 작업의 신뢰도 — 휴머노이드·4족 내비게이션을 그림과 장단점으로</a:t>
             </a:r>
           </a:p>
         </p:txBody>
@@ -6366,7 +6366,7 @@
         <p:spPr>
           <a:xfrm>
             <a:off x="3042146" y="5765800"/>
-            <a:ext cx="912812" cy="330200"/>
+            <a:ext cx="1412081" cy="330200"/>
           </a:xfrm>
           <a:prstGeom prst="roundRect">
             <a:avLst>
@@ -6397,7 +6397,7 @@
         <p:spPr>
           <a:xfrm>
             <a:off x="3181846" y="5816600"/>
-            <a:ext cx="677815" cy="336550"/>
+            <a:ext cx="1192062" cy="336550"/>
           </a:xfrm>
           <a:prstGeom prst="rect">
             <a:avLst/>
@@ -6424,7 +6424,7 @@
                 <a:ea typeface="Malgun Gothic"/>
                 <a:cs typeface="Malgun Gothic"/>
               </a:rPr>
-              <a:t>교사–학생</a:t>
+              <a:t>teacher–student</a:t>
             </a:r>
           </a:p>
         </p:txBody>
@@ -6437,7 +6437,7 @@
         </p:nvSpPr>
         <p:spPr>
           <a:xfrm>
-            <a:off x="4056559" y="5765800"/>
+            <a:off x="4555827" y="5765800"/>
             <a:ext cx="859135" cy="330200"/>
           </a:xfrm>
           <a:prstGeom prst="roundRect">
@@ -6468,7 +6468,7 @@
         </p:nvSpPr>
         <p:spPr>
           <a:xfrm>
-            <a:off x="4196259" y="5816600"/>
+            <a:off x="4695527" y="5816600"/>
             <a:ext cx="622527" cy="336550"/>
           </a:xfrm>
           <a:prstGeom prst="rect">
@@ -6509,7 +6509,7 @@
         </p:nvSpPr>
         <p:spPr>
           <a:xfrm>
-            <a:off x="5017294" y="5765800"/>
+            <a:off x="5516562" y="5765800"/>
             <a:ext cx="1080790" cy="330200"/>
           </a:xfrm>
           <a:prstGeom prst="roundRect">
@@ -6540,7 +6540,7 @@
         </p:nvSpPr>
         <p:spPr>
           <a:xfrm>
-            <a:off x="5156994" y="5816600"/>
+            <a:off x="5656262" y="5816600"/>
             <a:ext cx="850832" cy="336550"/>
           </a:xfrm>
           <a:prstGeom prst="rect">
@@ -6938,7 +6938,7 @@
                 <a:ea typeface="Malgun Gothic"/>
                 <a:cs typeface="Malgun Gothic"/>
               </a:rPr>
-              <a:t>특권 교사 → Soft-MoE 학생</a:t>
+              <a:t>privileged 교사 → Soft-MoE 학생</a:t>
             </a:r>
           </a:p>
         </p:txBody>
@@ -7847,7 +7847,7 @@
                 <a:ea typeface="Malgun Gothic"/>
                 <a:cs typeface="Malgun Gothic"/>
               </a:rPr>
-              <a:t>경계를 고르는 것은 모듈성과 몸의 능력을 맞바꾸는 일이다</a:t>
+              <a:t>경계 선택은 모듈성과 몸의 능력 사이의 트레이드오프다</a:t>
             </a:r>
           </a:p>
         </p:txBody>
@@ -8112,7 +8112,7 @@
                           <a:ea typeface="Malgun Gothic"/>
                           <a:cs typeface="Malgun Gothic"/>
                         </a:rPr>
-                        <a:t>진행 방향(아래 층 얼림)</a:t>
+                        <a:t>진행 방향(아래 층 고정)</a:t>
                       </a:r>
                     </a:p>
                   </a:txBody>
@@ -8635,7 +8635,7 @@
                 <a:ea typeface="Malgun Gothic"/>
                 <a:cs typeface="Malgun Gothic"/>
               </a:rPr>
-              <a:t>2 · 배경지식 · 교사–학생 증류</a:t>
+              <a:t>2 · 배경지식 · teacher–student 증류</a:t>
             </a:r>
           </a:p>
         </p:txBody>
@@ -8774,7 +8774,7 @@
                 <a:ea typeface="Malgun Gothic"/>
                 <a:cs typeface="Malgun Gothic"/>
               </a:rPr>
-              <a:t>특권 정보 학습. 시뮬은 정답(참 지형, 마찰, 다른 물체의 미래)을 아니까, 그것을 보는 교사를 먼저 RL로 배우고 배포 관측만 보는 학생에게 옮긴다</a:t>
+              <a:t>privileged 정보 학습. 시뮬은 정답(참 지형, 마찰, 다른 물체의 미래)을 아니까, 그것을 보는 교사를 먼저 RL로 배우고 배포 관측만 보는 학생에게 옮긴다</a:t>
             </a:r>
           </a:p>
         </p:txBody>
@@ -9533,7 +9533,7 @@
         <p:spPr>
           <a:xfrm>
             <a:off x="8208367" y="4403328"/>
-            <a:ext cx="3219310" cy="603200"/>
+            <a:ext cx="3219310" cy="879401"/>
           </a:xfrm>
           <a:prstGeom prst="rect">
             <a:avLst/>
@@ -9560,7 +9560,7 @@
                 <a:ea typeface="Malgun Gothic"/>
                 <a:cs typeface="Malgun Gothic"/>
               </a:rPr>
-              <a:t>DAgger로 학생 분포에서 라벨을 받고, 증류 손실과 RL 손실을 섞어 쓴다. 증류 가중은 천천히 줄인다.</a:t>
+              <a:t>DAgger로 학생 분포에서 라벨을 받고, 증류 손실과 RL 손실을 섞어 쓴다. 증류 손실 가중치는 천천히 줄인다.</a:t>
             </a:r>
           </a:p>
         </p:txBody>
@@ -9668,7 +9668,7 @@
                 <a:ea typeface="Malgun Gothic"/>
                 <a:cs typeface="Malgun Gothic"/>
               </a:rPr>
-              <a:t>다음 발 디딤 둘을 먼저 예측하고, 정책은 그 두 곳의 지형만 본다</a:t>
+              <a:t>다음 foothold 둘을 먼저 예측하고, 정책은 그 두 곳의 지형만 본다</a:t>
             </a:r>
           </a:p>
         </p:txBody>
@@ -9831,7 +9831,7 @@
         <p:spPr>
           <a:xfrm>
             <a:off x="927100" y="1507728"/>
-            <a:ext cx="917476" cy="241300"/>
+            <a:ext cx="1041301" cy="241300"/>
           </a:xfrm>
           <a:prstGeom prst="roundRect">
             <a:avLst>
@@ -9862,7 +9862,7 @@
         <p:spPr>
           <a:xfrm>
             <a:off x="1016000" y="1533128"/>
-            <a:ext cx="787266" cy="288925"/>
+            <a:ext cx="914806" cy="288925"/>
           </a:xfrm>
           <a:prstGeom prst="rect">
             <a:avLst/>
@@ -9889,7 +9889,7 @@
                 <a:ea typeface="Malgun Gothic"/>
                 <a:cs typeface="Malgun Gothic"/>
               </a:rPr>
-              <a:t>발 디딤 예측기</a:t>
+              <a:t>foothold 예측기</a:t>
             </a:r>
           </a:p>
         </p:txBody>
@@ -9930,7 +9930,7 @@
                 <a:ea typeface="Malgun Gothic"/>
                 <a:cs typeface="Malgun Gothic"/>
               </a:rPr>
-              <a:t>고유감각 70차원 → 다음 발 디딤 둘</a:t>
+              <a:t>proprioception 70차원 → 다음 foothold 둘</a:t>
             </a:r>
           </a:p>
         </p:txBody>
@@ -9971,7 +9971,7 @@
                 <a:ea typeface="Malgun Gothic"/>
                 <a:cs typeface="Malgun Gothic"/>
               </a:rPr>
-              <a:t>은닉층 둘의 작은 MLP. 지도를 보지 않는다. 정책을 굴려 실제 착지 위치로 주기적으로 처음부터 다시 맞춘다.</a:t>
+              <a:t>은닉층 둘의 작은 MLP. 지도를 보지 않는다. 정책을 rollout해 얻은 실제 착지 위치로 주기적으로 처음부터 다시 학습한다.</a:t>
             </a:r>
           </a:p>
         </p:txBody>
@@ -10289,7 +10289,7 @@
         </p:nvGraphicFramePr>
         <p:xfrm>
           <a:off x="711200" y="4086920"/>
-          <a:ext cx="5257800" cy="793770"/>
+          <a:ext cx="5257799" cy="793770"/>
         </p:xfrm>
         <a:graphic>
           <a:graphicData uri="http://schemas.openxmlformats.org/drawingml/2006/table">
@@ -10298,10 +10298,10 @@
                 <a:tableStyleId>{5C22544A-7EE6-4342-B048-85BDC9FD1C3A}</a:tableStyleId>
               </a:tblPr>
               <a:tblGrid>
-                <a:gridCol w="2037953"/>
-                <a:gridCol w="1045666"/>
-                <a:gridCol w="1174651"/>
-                <a:gridCol w="999530"/>
+                <a:gridCol w="1951236"/>
+                <a:gridCol w="933648"/>
+                <a:gridCol w="1480542"/>
+                <a:gridCol w="892373"/>
               </a:tblGrid>
               <a:tr h="270887">
                 <a:tc>
@@ -10366,7 +10366,7 @@
                           <a:ea typeface="Malgun Gothic"/>
                           <a:cs typeface="Malgun Gothic"/>
                         </a:rPr>
-                        <a:t>주의 인코더</a:t>
+                        <a:t>attention 인코더</a:t>
                       </a:r>
                     </a:p>
                   </a:txBody>
@@ -10514,7 +10514,7 @@
                           <a:ea typeface="Malgun Gothic"/>
                           <a:cs typeface="Malgun Gothic"/>
                         </a:rPr>
-                        <a:t>드문 디딤 지형 성공</a:t>
+                        <a:t>foothold 드문 지형 성공</a:t>
                       </a:r>
                     </a:p>
                   </a:txBody>
@@ -10667,7 +10667,7 @@
         <p:spPr>
           <a:xfrm>
             <a:off x="6223000" y="4346178"/>
-            <a:ext cx="5440934" cy="273050"/>
+            <a:ext cx="5440934" cy="495300"/>
           </a:xfrm>
           <a:prstGeom prst="rect">
             <a:avLst/>
@@ -10694,7 +10694,7 @@
                 <a:ea typeface="Malgun Gothic"/>
                 <a:cs typeface="Malgun Gothic"/>
               </a:rPr>
-              <a:t>Watch Your Step (Fig. 2): 예측한 발 디딤 둘레로 거른 높이 지도를 정책이 본다 — arXiv:2610.29612</a:t>
+              <a:t>Watch Your Step (Fig. 2): 예측한 foothold 둘레로 거른 높이 지도를 정책이 본다 — arXiv:2610.29612</a:t>
             </a:r>
           </a:p>
         </p:txBody>
@@ -11006,11 +11006,11 @@
                 <a:tableStyleId>{5C22544A-7EE6-4342-B048-85BDC9FD1C3A}</a:tableStyleId>
               </a:tblPr>
               <a:tblGrid>
-                <a:gridCol w="1625997"/>
-                <a:gridCol w="1563588"/>
-                <a:gridCol w="3201591"/>
-                <a:gridCol w="2129532"/>
-                <a:gridCol w="2248892"/>
+                <a:gridCol w="1692771"/>
+                <a:gridCol w="1458416"/>
+                <a:gridCol w="3120827"/>
+                <a:gridCol w="2257425"/>
+                <a:gridCol w="2240161"/>
               </a:tblGrid>
               <a:tr h="292814">
                 <a:tc>
@@ -11197,7 +11197,7 @@
                           <a:ea typeface="Malgun Gothic"/>
                           <a:cs typeface="Malgun Gothic"/>
                         </a:rPr>
-                        <a:t>신뢰도가 시간·거리로 주는 누적 점군 지도, U-Net으로 정제</a:t>
+                        <a:t>신뢰도가 시간·거리에 따라 줄어드는 누적 점군 지도, U-Net으로 정제</a:t>
                       </a:r>
                     </a:p>
                   </a:txBody>
@@ -11221,7 +11221,7 @@
                           <a:ea typeface="Malgun Gothic"/>
                           <a:cs typeface="Malgun Gothic"/>
                         </a:rPr>
-                        <a:t>단일 단계 RL, 조밀한 "위험 디딤" 벌점</a:t>
+                        <a:t>단일 단계 RL, 조밀한 "위험 foothold" 페널티</a:t>
                       </a:r>
                     </a:p>
                   </a:txBody>
@@ -11245,7 +11245,7 @@
                           <a:ea typeface="Malgun Gothic"/>
                           <a:cs typeface="Malgun Gothic"/>
                         </a:rPr>
-                        <a:t>시뮬 안전 디딤 거의 100 %, 실외 장거리</a:t>
+                        <a:t>시뮬 안전 foothold 거의 100 %, 실외 장거리</a:t>
                       </a:r>
                     </a:p>
                   </a:txBody>
@@ -11343,7 +11343,7 @@
                           <a:ea typeface="Malgun Gothic"/>
                           <a:cs typeface="Malgun Gothic"/>
                         </a:rPr>
-                        <a:t>다각형 위 발 디딤 계획, 20–30 Hz</a:t>
+                        <a:t>다각형 위 foothold 계획, 20–30 Hz</a:t>
                       </a:r>
                     </a:p>
                   </a:txBody>
@@ -11393,7 +11393,7 @@
                           <a:ea typeface="Malgun Gothic"/>
                           <a:cs typeface="Malgun Gothic"/>
                         </a:rPr>
-                        <a:t>지각 보행 + world model</a:t>
+                        <a:t>지형 인식 보행 + world model</a:t>
                       </a:r>
                     </a:p>
                   </a:txBody>
@@ -11465,7 +11465,7 @@
                           <a:ea typeface="Malgun Gothic"/>
                           <a:cs typeface="Malgun Gothic"/>
                         </a:rPr>
-                        <a:t>교사–학생 모방</a:t>
+                        <a:t>teacher–student 모방</a:t>
                       </a:r>
                     </a:p>
                   </a:txBody>
@@ -11489,7 +11489,7 @@
                           <a:ea typeface="Malgun Gothic"/>
                           <a:cs typeface="Malgun Gothic"/>
                         </a:rPr>
-                        <a:t>도시·오프로드 2 km 무개입</a:t>
+                        <a:t>도시·오프로드 2 km 개입 없이</a:t>
                       </a:r>
                     </a:p>
                   </a:txBody>
@@ -11734,7 +11734,7 @@
         <p:spPr>
           <a:xfrm>
             <a:off x="927100" y="3992166"/>
-            <a:ext cx="3219310" cy="327000"/>
+            <a:ext cx="3219310" cy="603200"/>
           </a:xfrm>
           <a:prstGeom prst="rect">
             <a:avLst/>
@@ -11761,7 +11761,7 @@
                 <a:ea typeface="Malgun Gothic"/>
                 <a:cs typeface="Malgun Gothic"/>
               </a:rPr>
-              <a:t>빈 곳을 망이 채운다. 그럴듯하지만 틀릴 수 있다.</a:t>
+              <a:t>빈 곳을 네트워크가 채운다. 그럴듯하지만 틀릴 수 있다.</a:t>
             </a:r>
           </a:p>
         </p:txBody>
@@ -12285,7 +12285,7 @@
                 <a:ea typeface="Malgun Gothic"/>
                 <a:cs typeface="Malgun Gothic"/>
               </a:rPr>
-              <a:t>잠재 공간에서 센서 잡음을 거른다. 무엇을 거르는지 보기 어렵다.</a:t>
+              <a:t>latent 공간에서 센서 잡음을 거른다. 무엇을 거르는지 보기 어렵다.</a:t>
             </a:r>
           </a:p>
         </p:txBody>
@@ -13261,7 +13261,7 @@
                 <a:ea typeface="Malgun Gothic"/>
                 <a:cs typeface="Malgun Gothic"/>
               </a:rPr>
-              <a:t>DAgger 가중을 앞 절반에 1에서 0.1로 내리고 끝까지 남긴다. 빼면 떨리는 행동이 생겼다.</a:t>
+              <a:t>DAgger 손실 가중치를 학습 앞 절반 동안 1에서 0.1로 내리고, 끝까지 작게 남긴다. 아예 빼면 떨리는 행동이 생겼다.</a:t>
             </a:r>
           </a:p>
         </p:txBody>
@@ -13924,7 +13924,7 @@
                 <a:ea typeface="Malgun Gothic"/>
                 <a:cs typeface="Malgun Gothic"/>
               </a:rPr>
-              <a:t>과제 공간과 맥락을 넓힌다</a:t>
+              <a:t>과제 공간과 컨텍스트를 넓힌다</a:t>
             </a:r>
           </a:p>
         </p:txBody>
@@ -13965,7 +13965,7 @@
                 <a:ea typeface="Malgun Gothic"/>
                 <a:cs typeface="Malgun Gothic"/>
               </a:rPr>
-              <a:t>이족·4족과 바퀴형을 절차 생성하고 관성·이득·관절 한계를 크게 무작위화. 맥락을 수십 초로 늘리고 시도 사이에 기억을 넘긴다(메타 RL).</a:t>
+              <a:t>이족·4족과 바퀴형을 절차 생성하고 관성·게인·관절 한계를 크게 랜덤화. 컨텍스트를 수십 초로 늘리고 시도 사이에 기억을 넘긴다(메타 RL).</a:t>
             </a:r>
           </a:p>
         </p:txBody>
@@ -14721,7 +14721,7 @@
                           <a:ea typeface="Malgun Gothic"/>
                           <a:cs typeface="Malgun Gothic"/>
                         </a:rPr>
-                        <a:t>이력 15스텝 + 형태 무작위화, 실물 Mini Cheetah</a:t>
+                        <a:t>이력 15스텝 + 형태 랜덤화, 실물 Mini Cheetah</a:t>
                       </a:r>
                     </a:p>
                   </a:txBody>
@@ -16029,7 +16029,7 @@
                 <a:ea typeface="Malgun Gothic"/>
                 <a:cs typeface="Malgun Gothic"/>
               </a:rPr>
-              <a:t>모방은 출발점이고, 로봇의 실제 실행과의 틈은 계획기·추종기·투영 중 한 곳에서 메운다.</a:t>
+              <a:t>모방은 출발점이고, 로봇의 실제 실행과의 틈은 플래너·추종기·투영 중 한 곳에서 메운다.</a:t>
             </a:r>
           </a:p>
         </p:txBody>
@@ -16450,7 +16450,7 @@
                           <a:ea typeface="Malgun Gothic"/>
                           <a:cs typeface="Malgun Gothic"/>
                         </a:rPr>
-                        <a:t>어디를 볼지는 어떻게 정하나? 교사–학생 증류란?</a:t>
+                        <a:t>어디를 볼지는 어떻게 정하나? teacher–student 증류란?</a:t>
                       </a:r>
                     </a:p>
                   </a:txBody>
@@ -17741,7 +17741,7 @@
                 <a:ea typeface="Malgun Gothic"/>
                 <a:cs typeface="Malgun Gothic"/>
               </a:rPr>
-              <a:t>3 · 계획기에서 메우기</a:t>
+              <a:t>3 · 플래너에서 메우기</a:t>
             </a:r>
           </a:p>
         </p:txBody>
@@ -17782,7 +17782,7 @@
                 <a:ea typeface="Malgun Gothic"/>
                 <a:cs typeface="Malgun Gothic"/>
               </a:rPr>
-              <a:t>사람 동작으로 flow 계획기를 배우고, 범용 추종기가 실행한다</a:t>
+              <a:t>사람 동작으로 flow 플래너를 배우고, 범용 추종기가 실행한다</a:t>
             </a:r>
           </a:p>
         </p:txBody>
@@ -18085,7 +18085,7 @@
                 <a:ea typeface="Malgun Gothic"/>
                 <a:cs typeface="Malgun Gothic"/>
               </a:rPr>
-              <a:t>장면 1,500개, 증강해 약 1,000시간. flow 계획기가 6.25 Hz로 0.5 s 앞 전신 기준 동작을 내고, 지형을 보는 추종기가 50 Hz로 관절 29개를 낸다.</a:t>
+              <a:t>장면 1,500개, 증강해 약 1,000시간. flow 플래너가 6.25 Hz로 0.5 s 앞 전신 기준 동작을 내고, 지형을 보는 추종기가 50 Hz로 관절 29개를 낸다.</a:t>
             </a:r>
           </a:p>
         </p:txBody>
@@ -18551,7 +18551,7 @@
         <p:spPr>
           <a:xfrm>
             <a:off x="927100" y="4453930"/>
-            <a:ext cx="660995" cy="241300"/>
+            <a:ext cx="661591" cy="241300"/>
           </a:xfrm>
           <a:prstGeom prst="roundRect">
             <a:avLst>
@@ -18582,7 +18582,7 @@
         <p:spPr>
           <a:xfrm>
             <a:off x="1016000" y="4479330"/>
-            <a:ext cx="523091" cy="288925"/>
+            <a:ext cx="523704" cy="288925"/>
           </a:xfrm>
           <a:prstGeom prst="rect">
             <a:avLst/>
@@ -18609,7 +18609,7 @@
                 <a:ea typeface="Malgun Gothic"/>
                 <a:cs typeface="Malgun Gothic"/>
               </a:rPr>
-              <a:t>빼기 실험</a:t>
+              <a:t>ablation</a:t>
             </a:r>
           </a:p>
         </p:txBody>
@@ -18650,7 +18650,7 @@
                 <a:ea typeface="Malgun Gothic"/>
                 <a:cs typeface="Malgun Gothic"/>
               </a:rPr>
-              <a:t>실시간 청킹(RTC), RL 후학습, 퍼텐셜장 손실을 각각 빼면 무접촉 성공이 20–26 %로 무너졌다.</a:t>
+              <a:t>실시간 청킹(RTC), RL post-training, 퍼텐셜장 손실을 각각 빼면 무접촉 성공이 20–26 %로 무너졌다.</a:t>
             </a:r>
           </a:p>
         </p:txBody>
@@ -18748,7 +18748,7 @@
                 <a:ea typeface="Malgun Gothic"/>
                 <a:cs typeface="Malgun Gothic"/>
               </a:rPr>
-              <a:t>PASSAGE (Fig. 2): VR 데이터, 높이 지도, 사전학습·RTC·RL 세 단계의 flow 계획기, 지형을 보는 추종기 — arXiv:2609.18732</a:t>
+              <a:t>PASSAGE (Fig. 2): VR 데이터, 높이 지도, 사전학습·RTC·RL 세 단계의 flow 플래너, 지형을 보는 추종기 — arXiv:2609.18732</a:t>
             </a:r>
           </a:p>
         </p:txBody>
@@ -19116,7 +19116,7 @@
         <p:spPr>
           <a:xfrm>
             <a:off x="927100" y="1507728"/>
-            <a:ext cx="660995" cy="241300"/>
+            <a:ext cx="1125141" cy="241300"/>
           </a:xfrm>
           <a:prstGeom prst="roundRect">
             <a:avLst>
@@ -19147,7 +19147,7 @@
         <p:spPr>
           <a:xfrm>
             <a:off x="1016000" y="1533128"/>
-            <a:ext cx="523091" cy="288925"/>
+            <a:ext cx="1001161" cy="288925"/>
           </a:xfrm>
           <a:prstGeom prst="rect">
             <a:avLst/>
@@ -19174,7 +19174,7 @@
                 <a:ea typeface="Malgun Gothic"/>
                 <a:cs typeface="Malgun Gothic"/>
               </a:rPr>
-              <a:t>짝 데이터</a:t>
+              <a:t>쌍(paired) 데이터</a:t>
             </a:r>
           </a:p>
         </p:txBody>
@@ -19419,7 +19419,7 @@
         <p:spPr>
           <a:xfrm>
             <a:off x="927100" y="2980829"/>
-            <a:ext cx="705644" cy="241300"/>
+            <a:ext cx="1155502" cy="241300"/>
           </a:xfrm>
           <a:prstGeom prst="roundRect">
             <a:avLst>
@@ -19450,7 +19450,7 @@
         <p:spPr>
           <a:xfrm>
             <a:off x="1016000" y="3006229"/>
-            <a:ext cx="569079" cy="288925"/>
+            <a:ext cx="1032433" cy="288925"/>
           </a:xfrm>
           <a:prstGeom prst="rect">
             <a:avLst/>
@@ -19477,7 +19477,7 @@
                 <a:ea typeface="Malgun Gothic"/>
                 <a:cs typeface="Malgun Gothic"/>
               </a:rPr>
-              <a:t>교사–학생</a:t>
+              <a:t>teacher–student</a:t>
             </a:r>
           </a:p>
         </p:txBody>
@@ -19559,7 +19559,7 @@
                 <a:ea typeface="Malgun Gothic"/>
                 <a:cs typeface="Malgun Gothic"/>
               </a:rPr>
-              <a:t>교사는 높이 지도를 보고 PPO로, 학생은 평지 기준 동작 창, 고유감각, 깊이 한 장만 보고 DAgger로.</a:t>
+              <a:t>교사는 높이 지도를 보고 PPO로, 학생은 평지 기준 동작 창, proprioception, 깊이 한 장만 보고 DAgger로.</a:t>
             </a:r>
           </a:p>
         </p:txBody>
@@ -19919,7 +19919,7 @@
                 <a:ea typeface="Malgun Gothic"/>
                 <a:cs typeface="Malgun Gothic"/>
               </a:rPr>
-              <a:t>NEXUS (Fig. 2): (a) 접촉 기반 동작 적응 (b) 특권 PPO 교사와 DAgger 학생 (c) 깊이 영상 원격조종 배포 — arXiv:2609.39000</a:t>
+              <a:t>NEXUS (Fig. 2): (a) 접촉 기반 동작 적응 (b) privileged PPO 교사와 DAgger 학생 (c) 깊이 영상 원격조종 배포 — arXiv:2609.39000</a:t>
             </a:r>
           </a:p>
         </p:txBody>
@@ -20222,7 +20222,7 @@
                 <a:ea typeface="Malgun Gothic"/>
                 <a:cs typeface="Malgun Gothic"/>
               </a:rPr>
-              <a:t>(a) 잠재 명령의 크기만 안전 구 안으로 줄인다(방향은 둔다) (b) 조향 한계처럼 비볼록한 실행 가능 집합은 지금 근처에서 선형화해 QP로 가장 가까운 점을 찾는다</a:t>
+              <a:t>(a) latent 명령의 크기만 안전 구 안으로 줄인다(방향은 둔다) (b) 조향 한계처럼 비볼록한 실행 가능 집합은 지금 근처에서 선형화해 QP로 가장 가까운 점을 찾는다</a:t>
             </a:r>
           </a:p>
         </p:txBody>
@@ -20510,7 +20510,7 @@
                           <a:ea typeface="Malgun Gothic"/>
                           <a:cs typeface="Malgun Gothic"/>
                         </a:rPr>
-                        <a:t>잠재 명령 크기를 안전 구 안으로</a:t>
+                        <a:t>latent 명령 크기를 안전 구 안으로</a:t>
                       </a:r>
                     </a:p>
                   </a:txBody>
@@ -20560,7 +20560,7 @@
                           <a:ea typeface="Malgun Gothic"/>
                           <a:cs typeface="Malgun Gothic"/>
                         </a:rPr>
-                        <a:t>공통 잠재</a:t>
+                        <a:t>공통 latent</a:t>
                       </a:r>
                     </a:p>
                   </a:txBody>
@@ -20608,7 +20608,7 @@
                           <a:ea typeface="Malgun Gothic"/>
                           <a:cs typeface="Malgun Gothic"/>
                         </a:rPr>
-                        <a:t>기술 정책들을 공통 잠재 명령으로 + flow Planner</a:t>
+                        <a:t>기술 정책들을 공통 latent 명령으로 + flow Planner</a:t>
                       </a:r>
                     </a:p>
                   </a:txBody>
@@ -20765,7 +20765,7 @@
         </p:nvGraphicFramePr>
         <p:xfrm>
           <a:off x="711200" y="1361678"/>
-          <a:ext cx="10769601" cy="1465252"/>
+          <a:ext cx="10769599" cy="1465252"/>
         </p:xfrm>
         <a:graphic>
           <a:graphicData uri="http://schemas.openxmlformats.org/drawingml/2006/table">
@@ -20774,10 +20774,10 @@
                 <a:tableStyleId>{5C22544A-7EE6-4342-B048-85BDC9FD1C3A}</a:tableStyleId>
               </a:tblPr>
               <a:tblGrid>
-                <a:gridCol w="1489373"/>
-                <a:gridCol w="2064048"/>
-                <a:gridCol w="3435152"/>
-                <a:gridCol w="3781028"/>
+                <a:gridCol w="1389162"/>
+                <a:gridCol w="1925141"/>
+                <a:gridCol w="3928566"/>
+                <a:gridCol w="3526730"/>
               </a:tblGrid>
               <a:tr h="300067">
                 <a:tc>
@@ -20892,7 +20892,7 @@
                           <a:ea typeface="Malgun Gothic"/>
                           <a:cs typeface="Malgun Gothic"/>
                         </a:rPr>
-                        <a:t>계획기</a:t>
+                        <a:t>플래너</a:t>
                       </a:r>
                     </a:p>
                   </a:txBody>
@@ -21234,7 +21234,7 @@
                           <a:ea typeface="Malgun Gothic"/>
                           <a:cs typeface="Malgun Gothic"/>
                         </a:rPr>
-                        <a:t>층 사이 오차까지 다듬는다</a:t>
+                        <a:t>층 사이 오차까지 학습으로 줄인다</a:t>
                       </a:r>
                     </a:p>
                   </a:txBody>
@@ -21351,7 +21351,7 @@
                 <a:ea typeface="Malgun Gothic"/>
                 <a:cs typeface="Malgun Gothic"/>
               </a:rPr>
-              <a:t> 사람 동작·영상으로 시작하고, 시뮬 RL과 교사–학생으로 로봇의 실제 실행에 맞춘다.</a:t>
+              <a:t> 사람 동작·영상으로 시작하고, 시뮬 RL과 teacher–student로 로봇의 실제 실행에 맞춘다.</a:t>
             </a:r>
           </a:p>
         </p:txBody>
@@ -22229,7 +22229,7 @@
                 <a:ea typeface="Malgun Gothic"/>
                 <a:cs typeface="Malgun Gothic"/>
               </a:rPr>
-              <a:t>층마다 받기</a:t>
+              <a:t>층마다 복구</a:t>
             </a:r>
           </a:p>
         </p:txBody>
@@ -22640,7 +22640,7 @@
                 <a:ea typeface="Malgun Gothic"/>
                 <a:cs typeface="Malgun Gothic"/>
               </a:rPr>
-              <a:t>임무 VLM, 운동 층, 전신 제어기의 세 층을 RL로 다듬는다</a:t>
+              <a:t>임무 VLM, 운동 층, 전신 제어기의 세 층을 RL로 fine-tuning한다</a:t>
             </a:r>
           </a:p>
         </p:txBody>
@@ -23246,7 +23246,7 @@
                 <a:ea typeface="Malgun Gothic"/>
                 <a:cs typeface="Malgun Gothic"/>
               </a:rPr>
-              <a:t>RL 기술은 대부분 시뮬에서 표적 무작위화로 배웠다.</a:t>
+              <a:t>RL 기술은 대부분 시뮬에서 타깃 랜덤화로 배웠다.</a:t>
             </a:r>
           </a:p>
         </p:txBody>
@@ -23549,7 +23549,7 @@
                 <a:ea typeface="Malgun Gothic"/>
                 <a:cs typeface="Malgun Gothic"/>
               </a:rPr>
-              <a:t>힘을 아는 전신 제어기. 구조는 공개되지 않았다.</a:t>
+              <a:t>힘을 고려하는 전신 제어기. 구조는 공개되지 않았다.</a:t>
             </a:r>
           </a:p>
         </p:txBody>
@@ -23866,7 +23866,7 @@
         <p:spPr>
           <a:xfrm>
             <a:off x="711200" y="781050"/>
-            <a:ext cx="11118088" cy="554335"/>
+            <a:ext cx="11118088" cy="1057870"/>
           </a:xfrm>
           <a:prstGeom prst="rect">
             <a:avLst/>
@@ -23893,7 +23893,7 @@
                 <a:ea typeface="Malgun Gothic"/>
                 <a:cs typeface="Malgun Gothic"/>
               </a:rPr>
-              <a:t>조향 바퀴 네 개 바닥의 반휴머노이드가 한 시간짜리 작업을 끊지 않는다</a:t>
+              <a:t>조향 바퀴 네 개 베이스 위의 반휴머노이드가 한 시간짜리 작업을 끊지 않는다</a:t>
             </a:r>
           </a:p>
         </p:txBody>
@@ -23906,7 +23906,7 @@
         </p:nvSpPr>
         <p:spPr>
           <a:xfrm>
-            <a:off x="711200" y="1361678"/>
+            <a:off x="711200" y="1764506"/>
             <a:ext cx="3488234" cy="1810841"/>
           </a:xfrm>
           <a:prstGeom prst="roundRect">
@@ -23937,7 +23937,7 @@
         </p:nvSpPr>
         <p:spPr>
           <a:xfrm>
-            <a:off x="711200" y="1361678"/>
+            <a:off x="711200" y="1764506"/>
             <a:ext cx="3488234" cy="6350"/>
           </a:xfrm>
           <a:prstGeom prst="rect">
@@ -23966,7 +23966,7 @@
         </p:nvSpPr>
         <p:spPr>
           <a:xfrm>
-            <a:off x="4193084" y="1361678"/>
+            <a:off x="4193084" y="1764506"/>
             <a:ext cx="6350" cy="1810841"/>
           </a:xfrm>
           <a:prstGeom prst="rect">
@@ -23995,7 +23995,7 @@
         </p:nvSpPr>
         <p:spPr>
           <a:xfrm>
-            <a:off x="711200" y="3166170"/>
+            <a:off x="711200" y="3568998"/>
             <a:ext cx="3488234" cy="6350"/>
           </a:xfrm>
           <a:prstGeom prst="rect">
@@ -24024,7 +24024,7 @@
         </p:nvSpPr>
         <p:spPr>
           <a:xfrm>
-            <a:off x="711200" y="1361678"/>
+            <a:off x="711200" y="1764506"/>
             <a:ext cx="50800" cy="1810841"/>
           </a:xfrm>
           <a:prstGeom prst="roundRect">
@@ -24055,7 +24055,7 @@
         </p:nvSpPr>
         <p:spPr>
           <a:xfrm>
-            <a:off x="927100" y="1507728"/>
+            <a:off x="927100" y="1910556"/>
             <a:ext cx="291108" cy="241300"/>
           </a:xfrm>
           <a:prstGeom prst="roundRect">
@@ -24086,7 +24086,7 @@
         </p:nvSpPr>
         <p:spPr>
           <a:xfrm>
-            <a:off x="1016000" y="1533128"/>
+            <a:off x="1016000" y="1935956"/>
             <a:ext cx="142107" cy="288925"/>
           </a:xfrm>
           <a:prstGeom prst="rect">
@@ -24127,7 +24127,7 @@
         </p:nvSpPr>
         <p:spPr>
           <a:xfrm>
-            <a:off x="927100" y="1825228"/>
+            <a:off x="927100" y="2228056"/>
             <a:ext cx="3219310" cy="339651"/>
           </a:xfrm>
           <a:prstGeom prst="rect">
@@ -24155,7 +24155,7 @@
                 <a:ea typeface="Malgun Gothic"/>
                 <a:cs typeface="Malgun Gothic"/>
               </a:rPr>
-              <a:t>바퀴 바닥 + 사람 모양 상체</a:t>
+              <a:t>바퀴 베이스 + 사람 모양 상체</a:t>
             </a:r>
           </a:p>
         </p:txBody>
@@ -24168,7 +24168,7 @@
         </p:nvSpPr>
         <p:spPr>
           <a:xfrm>
-            <a:off x="927100" y="2132509"/>
+            <a:off x="927100" y="2535337"/>
             <a:ext cx="3219310" cy="603200"/>
           </a:xfrm>
           <a:prstGeom prst="rect">
@@ -24196,7 +24196,7 @@
                 <a:ea typeface="Malgun Gothic"/>
                 <a:cs typeface="Malgun Gothic"/>
               </a:rPr>
-              <a:t>접히는 하체 아래에 조향 바퀴 네 개 바닥, 7자유도 팔 둘.</a:t>
+              <a:t>접히는 하체 아래에 조향 바퀴 네 개 베이스, 7자유도 팔 둘.</a:t>
             </a:r>
           </a:p>
         </p:txBody>
@@ -24209,7 +24209,7 @@
         </p:nvSpPr>
         <p:spPr>
           <a:xfrm>
-            <a:off x="4351834" y="1361678"/>
+            <a:off x="4351834" y="1764506"/>
             <a:ext cx="3488234" cy="1810841"/>
           </a:xfrm>
           <a:prstGeom prst="roundRect">
@@ -24240,7 +24240,7 @@
         </p:nvSpPr>
         <p:spPr>
           <a:xfrm>
-            <a:off x="4351834" y="1361678"/>
+            <a:off x="4351834" y="1764506"/>
             <a:ext cx="3488234" cy="6350"/>
           </a:xfrm>
           <a:prstGeom prst="rect">
@@ -24269,7 +24269,7 @@
         </p:nvSpPr>
         <p:spPr>
           <a:xfrm>
-            <a:off x="7833717" y="1361678"/>
+            <a:off x="7833717" y="1764506"/>
             <a:ext cx="6350" cy="1810841"/>
           </a:xfrm>
           <a:prstGeom prst="rect">
@@ -24298,7 +24298,7 @@
         </p:nvSpPr>
         <p:spPr>
           <a:xfrm>
-            <a:off x="4351834" y="3166170"/>
+            <a:off x="4351834" y="3568998"/>
             <a:ext cx="3488234" cy="6350"/>
           </a:xfrm>
           <a:prstGeom prst="rect">
@@ -24327,7 +24327,7 @@
         </p:nvSpPr>
         <p:spPr>
           <a:xfrm>
-            <a:off x="4351834" y="1361678"/>
+            <a:off x="4351834" y="1764506"/>
             <a:ext cx="50800" cy="1810841"/>
           </a:xfrm>
           <a:prstGeom prst="roundRect">
@@ -24358,7 +24358,7 @@
         </p:nvSpPr>
         <p:spPr>
           <a:xfrm>
-            <a:off x="4567734" y="1507728"/>
+            <a:off x="4567734" y="1910556"/>
             <a:ext cx="434380" cy="241300"/>
           </a:xfrm>
           <a:prstGeom prst="roundRect">
@@ -24389,7 +24389,7 @@
         </p:nvSpPr>
         <p:spPr>
           <a:xfrm>
-            <a:off x="4656634" y="1533128"/>
+            <a:off x="4656634" y="1935956"/>
             <a:ext cx="289677" cy="288925"/>
           </a:xfrm>
           <a:prstGeom prst="rect">
@@ -24430,7 +24430,7 @@
         </p:nvSpPr>
         <p:spPr>
           <a:xfrm>
-            <a:off x="4567734" y="1825228"/>
+            <a:off x="4567734" y="2228056"/>
             <a:ext cx="3219310" cy="628501"/>
           </a:xfrm>
           <a:prstGeom prst="rect">
@@ -24471,7 +24471,7 @@
         </p:nvSpPr>
         <p:spPr>
           <a:xfrm>
-            <a:off x="4567734" y="2363589"/>
+            <a:off x="4567734" y="2766417"/>
             <a:ext cx="3219310" cy="879401"/>
           </a:xfrm>
           <a:prstGeom prst="rect">
@@ -24512,7 +24512,7 @@
         </p:nvSpPr>
         <p:spPr>
           <a:xfrm>
-            <a:off x="7992467" y="1361678"/>
+            <a:off x="7992467" y="1764506"/>
             <a:ext cx="3488234" cy="1810841"/>
           </a:xfrm>
           <a:prstGeom prst="roundRect">
@@ -24543,7 +24543,7 @@
         </p:nvSpPr>
         <p:spPr>
           <a:xfrm>
-            <a:off x="7992467" y="1361678"/>
+            <a:off x="7992467" y="1764506"/>
             <a:ext cx="3488234" cy="6350"/>
           </a:xfrm>
           <a:prstGeom prst="rect">
@@ -24572,7 +24572,7 @@
         </p:nvSpPr>
         <p:spPr>
           <a:xfrm>
-            <a:off x="11474351" y="1361678"/>
+            <a:off x="11474351" y="1764506"/>
             <a:ext cx="6350" cy="1810841"/>
           </a:xfrm>
           <a:prstGeom prst="rect">
@@ -24601,7 +24601,7 @@
         </p:nvSpPr>
         <p:spPr>
           <a:xfrm>
-            <a:off x="7992467" y="3166170"/>
+            <a:off x="7992467" y="3568998"/>
             <a:ext cx="3488234" cy="6350"/>
           </a:xfrm>
           <a:prstGeom prst="rect">
@@ -24630,7 +24630,7 @@
         </p:nvSpPr>
         <p:spPr>
           <a:xfrm>
-            <a:off x="7992467" y="1361678"/>
+            <a:off x="7992467" y="1764506"/>
             <a:ext cx="50800" cy="1810841"/>
           </a:xfrm>
           <a:prstGeom prst="roundRect">
@@ -24661,7 +24661,7 @@
         </p:nvSpPr>
         <p:spPr>
           <a:xfrm>
-            <a:off x="8208367" y="1507728"/>
+            <a:off x="8208367" y="1910556"/>
             <a:ext cx="973138" cy="241300"/>
           </a:xfrm>
           <a:prstGeom prst="roundRect">
@@ -24692,7 +24692,7 @@
         </p:nvSpPr>
         <p:spPr>
           <a:xfrm>
-            <a:off x="8297267" y="1533128"/>
+            <a:off x="8297267" y="1935956"/>
             <a:ext cx="844598" cy="288925"/>
           </a:xfrm>
           <a:prstGeom prst="rect">
@@ -24733,7 +24733,7 @@
         </p:nvSpPr>
         <p:spPr>
           <a:xfrm>
-            <a:off x="8208367" y="1825228"/>
+            <a:off x="8208367" y="2228056"/>
             <a:ext cx="3219310" cy="339651"/>
           </a:xfrm>
           <a:prstGeom prst="rect">
@@ -24774,7 +24774,7 @@
         </p:nvSpPr>
         <p:spPr>
           <a:xfrm>
-            <a:off x="8208367" y="2132509"/>
+            <a:off x="8208367" y="2535337"/>
             <a:ext cx="3219310" cy="879401"/>
           </a:xfrm>
           <a:prstGeom prst="rect">
@@ -24815,7 +24815,7 @@
         </p:nvSpPr>
         <p:spPr>
           <a:xfrm>
-            <a:off x="711200" y="3350320"/>
+            <a:off x="711200" y="3753148"/>
             <a:ext cx="5308600" cy="1051520"/>
           </a:xfrm>
           <a:prstGeom prst="roundRect">
@@ -24846,7 +24846,7 @@
         </p:nvSpPr>
         <p:spPr>
           <a:xfrm>
-            <a:off x="711200" y="3350320"/>
+            <a:off x="711200" y="3753148"/>
             <a:ext cx="5308600" cy="6350"/>
           </a:xfrm>
           <a:prstGeom prst="rect">
@@ -24875,7 +24875,7 @@
         </p:nvSpPr>
         <p:spPr>
           <a:xfrm>
-            <a:off x="6013450" y="3350320"/>
+            <a:off x="6013450" y="3753148"/>
             <a:ext cx="6350" cy="1051520"/>
           </a:xfrm>
           <a:prstGeom prst="rect">
@@ -24904,7 +24904,7 @@
         </p:nvSpPr>
         <p:spPr>
           <a:xfrm>
-            <a:off x="711200" y="4395490"/>
+            <a:off x="711200" y="4798318"/>
             <a:ext cx="5308600" cy="6350"/>
           </a:xfrm>
           <a:prstGeom prst="rect">
@@ -24933,7 +24933,7 @@
         </p:nvSpPr>
         <p:spPr>
           <a:xfrm>
-            <a:off x="711200" y="3350320"/>
+            <a:off x="711200" y="3753148"/>
             <a:ext cx="50800" cy="1051520"/>
           </a:xfrm>
           <a:prstGeom prst="roundRect">
@@ -24964,7 +24964,7 @@
         </p:nvSpPr>
         <p:spPr>
           <a:xfrm>
-            <a:off x="927100" y="3496370"/>
+            <a:off x="927100" y="3899198"/>
             <a:ext cx="547688" cy="241300"/>
           </a:xfrm>
           <a:prstGeom prst="roundRect">
@@ -24995,7 +24995,7 @@
         </p:nvSpPr>
         <p:spPr>
           <a:xfrm>
-            <a:off x="1016000" y="3521770"/>
+            <a:off x="1016000" y="3924598"/>
             <a:ext cx="406384" cy="288925"/>
           </a:xfrm>
           <a:prstGeom prst="rect">
@@ -25036,7 +25036,7 @@
         </p:nvSpPr>
         <p:spPr>
           <a:xfrm>
-            <a:off x="927100" y="3813870"/>
+            <a:off x="927100" y="4216698"/>
             <a:ext cx="5094288" cy="603200"/>
           </a:xfrm>
           <a:prstGeom prst="rect">
@@ -25077,7 +25077,7 @@
         </p:nvSpPr>
         <p:spPr>
           <a:xfrm>
-            <a:off x="6172200" y="3350320"/>
+            <a:off x="6172200" y="3753148"/>
             <a:ext cx="5308600" cy="1051520"/>
           </a:xfrm>
           <a:prstGeom prst="roundRect">
@@ -25108,7 +25108,7 @@
         </p:nvSpPr>
         <p:spPr>
           <a:xfrm>
-            <a:off x="6172200" y="3350320"/>
+            <a:off x="6172200" y="3753148"/>
             <a:ext cx="5308600" cy="6350"/>
           </a:xfrm>
           <a:prstGeom prst="rect">
@@ -25137,7 +25137,7 @@
         </p:nvSpPr>
         <p:spPr>
           <a:xfrm>
-            <a:off x="11474450" y="3350320"/>
+            <a:off x="11474450" y="3753148"/>
             <a:ext cx="6350" cy="1051520"/>
           </a:xfrm>
           <a:prstGeom prst="rect">
@@ -25166,7 +25166,7 @@
         </p:nvSpPr>
         <p:spPr>
           <a:xfrm>
-            <a:off x="6172200" y="4395490"/>
+            <a:off x="6172200" y="4798318"/>
             <a:ext cx="5308600" cy="6350"/>
           </a:xfrm>
           <a:prstGeom prst="rect">
@@ -25195,7 +25195,7 @@
         </p:nvSpPr>
         <p:spPr>
           <a:xfrm>
-            <a:off x="6172200" y="3350320"/>
+            <a:off x="6172200" y="3753148"/>
             <a:ext cx="50800" cy="1051520"/>
           </a:xfrm>
           <a:prstGeom prst="roundRect">
@@ -25226,7 +25226,7 @@
         </p:nvSpPr>
         <p:spPr>
           <a:xfrm>
-            <a:off x="6388100" y="3496370"/>
+            <a:off x="6388100" y="3899198"/>
             <a:ext cx="804168" cy="241300"/>
           </a:xfrm>
           <a:prstGeom prst="roundRect">
@@ -25257,7 +25257,7 @@
         </p:nvSpPr>
         <p:spPr>
           <a:xfrm>
-            <a:off x="6477000" y="3521770"/>
+            <a:off x="6477000" y="3924598"/>
             <a:ext cx="670559" cy="288925"/>
           </a:xfrm>
           <a:prstGeom prst="rect">
@@ -25298,7 +25298,7 @@
         </p:nvSpPr>
         <p:spPr>
           <a:xfrm>
-            <a:off x="6388100" y="3813870"/>
+            <a:off x="6388100" y="4216698"/>
             <a:ext cx="5094288" cy="327000"/>
           </a:xfrm>
           <a:prstGeom prst="rect">
@@ -26017,7 +26017,7 @@
                 <a:ea typeface="Malgun Gothic"/>
                 <a:cs typeface="Malgun Gothic"/>
               </a:rPr>
-              <a:t>5 강화학습의 PPO, 6 시뮬레이션의 무작위화, 1 인식의 높이 지도, 3 제어의 층 구조.</a:t>
+              <a:t>5 강화학습의 PPO, 6 시뮬레이션의 도메인 랜덤화, 1 인식의 높이 지도, 3 제어의 층 구조.</a:t>
             </a:r>
           </a:p>
         </p:txBody>
@@ -26664,7 +26664,7 @@
         </p:nvGraphicFramePr>
         <p:xfrm>
           <a:off x="711200" y="1361678"/>
-          <a:ext cx="10769600" cy="2370516"/>
+          <a:ext cx="10769599" cy="2370516"/>
         </p:xfrm>
         <a:graphic>
           <a:graphicData uri="http://schemas.openxmlformats.org/drawingml/2006/table">
@@ -26673,11 +26673,11 @@
                 <a:tableStyleId>{5C22544A-7EE6-4342-B048-85BDC9FD1C3A}</a:tableStyleId>
               </a:tblPr>
               <a:tblGrid>
-                <a:gridCol w="2156222"/>
-                <a:gridCol w="1040507"/>
-                <a:gridCol w="2270522"/>
-                <a:gridCol w="2117427"/>
-                <a:gridCol w="3184922"/>
+                <a:gridCol w="2114252"/>
+                <a:gridCol w="1020266"/>
+                <a:gridCol w="2435820"/>
+                <a:gridCol w="2076152"/>
+                <a:gridCol w="3123109"/>
               </a:tblGrid>
               <a:tr h="270887">
                 <a:tc>
@@ -27230,7 +27230,7 @@
                           <a:ea typeface="Malgun Gothic"/>
                           <a:cs typeface="Malgun Gothic"/>
                         </a:rPr>
-                        <a:t>발 디딤 둘레 102값</a:t>
+                        <a:t>foothold 둘레 102값</a:t>
                       </a:r>
                     </a:p>
                   </a:txBody>
@@ -27278,7 +27278,7 @@
                           <a:ea typeface="Malgun Gothic"/>
                           <a:cs typeface="Malgun Gothic"/>
                         </a:rPr>
-                        <a:t>드문 디딤 74.2 %</a:t>
+                        <a:t>foothold 드문 지형 74.2 %</a:t>
                       </a:r>
                     </a:p>
                   </a:txBody>
@@ -27718,7 +27718,7 @@
                           <a:ea typeface="Malgun Gothic"/>
                           <a:cs typeface="Malgun Gothic"/>
                         </a:rPr>
-                        <a:t>고유감각</a:t>
+                        <a:t>proprioception</a:t>
                       </a:r>
                     </a:p>
                   </a:txBody>
@@ -28146,7 +28146,7 @@
                 <a:ea typeface="Malgun Gothic"/>
                 <a:cs typeface="Malgun Gothic"/>
               </a:rPr>
-              <a:t>특권 교사 → 배포 관측 학생</a:t>
+              <a:t>privileged 교사 → 배포 관측 학생</a:t>
             </a:r>
           </a:p>
         </p:txBody>
@@ -28490,7 +28490,7 @@
                 <a:ea typeface="Malgun Gothic"/>
                 <a:cs typeface="Malgun Gothic"/>
               </a:rPr>
-              <a:t>계획기와 추종기를 서로에게 맞춰 학습하거나, 출력을 투영한다.</a:t>
+              <a:t>플래너와 추종기를 서로에게 맞춰 학습하거나, 출력을 투영한다.</a:t>
             </a:r>
           </a:p>
         </p:txBody>
@@ -29287,7 +29287,7 @@
                 <a:ea typeface="Malgun Gothic"/>
                 <a:cs typeface="Malgun Gothic"/>
               </a:rPr>
-              <a:t>다리 로봇 내비게이션의 설계 선택을 한 표로 본다</a:t>
+              <a:t>다리 로봇 내비게이션의 설계 선택을 한 표로 정리한다</a:t>
             </a:r>
           </a:p>
         </p:txBody>
@@ -29600,7 +29600,7 @@
                           <a:ea typeface="Malgun Gothic"/>
                           <a:cs typeface="Malgun Gothic"/>
                         </a:rPr>
-                        <a:t>골라서(발 디딤 둘레): 빠른 학습, 옆을 늦게 봄</a:t>
+                        <a:t>골라서(foothold 둘레): 빠른 학습, 옆을 늦게 봄</a:t>
                       </a:r>
                     </a:p>
                   </a:txBody>
@@ -29674,7 +29674,7 @@
                           <a:ea typeface="Malgun Gothic"/>
                           <a:cs typeface="Malgun Gothic"/>
                         </a:rPr>
-                        <a:t>교사–학생: 부분 관측에 강함, 두 단계</a:t>
+                        <a:t>teacher–student: 부분 관측에 강함, 두 단계</a:t>
                       </a:r>
                     </a:p>
                   </a:txBody>
@@ -31326,7 +31326,7 @@
                 <a:ea typeface="Malgun Gothic"/>
                 <a:cs typeface="Malgun Gothic"/>
               </a:rPr>
-              <a:t>조향 한계 같은 제약을 상자로 근사하면 못 하는 명령을 낸다.</a:t>
+              <a:t>조향 한계 같은 제약을 박스 제약으로 근사하면 못 하는 명령을 낸다.</a:t>
             </a:r>
           </a:p>
         </p:txBody>
@@ -31448,11 +31448,11 @@
         <p:spPr>
           <a:xfrm>
             <a:off x="711200" y="1361678"/>
-            <a:ext cx="3488234" cy="1358801"/>
+            <a:ext cx="3488234" cy="1579761"/>
           </a:xfrm>
           <a:prstGeom prst="roundRect">
             <a:avLst>
-              <a:gd name="adj" fmla="val 5607"/>
+              <a:gd name="adj" fmla="val 4823"/>
             </a:avLst>
           </a:prstGeom>
           <a:solidFill>
@@ -31508,7 +31508,7 @@
         <p:spPr>
           <a:xfrm>
             <a:off x="4193084" y="1361678"/>
-            <a:ext cx="6350" cy="1358801"/>
+            <a:ext cx="6350" cy="1579761"/>
           </a:xfrm>
           <a:prstGeom prst="rect">
             <a:avLst/>
@@ -31536,7 +31536,7 @@
         </p:nvSpPr>
         <p:spPr>
           <a:xfrm>
-            <a:off x="711200" y="2714129"/>
+            <a:off x="711200" y="2935089"/>
             <a:ext cx="3488234" cy="6350"/>
           </a:xfrm>
           <a:prstGeom prst="rect">
@@ -31566,7 +31566,7 @@
         <p:spPr>
           <a:xfrm>
             <a:off x="711200" y="1361678"/>
-            <a:ext cx="50800" cy="1358801"/>
+            <a:ext cx="50800" cy="1579761"/>
           </a:xfrm>
           <a:prstGeom prst="roundRect">
             <a:avLst>
@@ -31710,7 +31710,7 @@
         <p:spPr>
           <a:xfrm>
             <a:off x="927100" y="2132509"/>
-            <a:ext cx="3219310" cy="603200"/>
+            <a:ext cx="3219310" cy="879401"/>
           </a:xfrm>
           <a:prstGeom prst="rect">
             <a:avLst/>
@@ -31737,7 +31737,7 @@
                 <a:ea typeface="Malgun Gothic"/>
                 <a:cs typeface="Malgun Gothic"/>
               </a:rPr>
-              <a:t>대규모 병렬 학습(Rudin 외 2021) → RMA(이력에서 적응) → 교사–학생 지형 보행(Miki 외 2022).</a:t>
+              <a:t>대규모 병렬 학습(Rudin 외 2021) → RMA(이력에서 적응) → teacher–student 지형 보행(Miki 외 2022).</a:t>
             </a:r>
           </a:p>
         </p:txBody>
@@ -31751,11 +31751,11 @@
         <p:spPr>
           <a:xfrm>
             <a:off x="4351834" y="1361678"/>
-            <a:ext cx="3488234" cy="1358801"/>
+            <a:ext cx="3488234" cy="1579761"/>
           </a:xfrm>
           <a:prstGeom prst="roundRect">
             <a:avLst>
-              <a:gd name="adj" fmla="val 5607"/>
+              <a:gd name="adj" fmla="val 4823"/>
             </a:avLst>
           </a:prstGeom>
           <a:solidFill>
@@ -31811,7 +31811,7 @@
         <p:spPr>
           <a:xfrm>
             <a:off x="7833717" y="1361678"/>
-            <a:ext cx="6350" cy="1358801"/>
+            <a:ext cx="6350" cy="1579761"/>
           </a:xfrm>
           <a:prstGeom prst="rect">
             <a:avLst/>
@@ -31839,7 +31839,7 @@
         </p:nvSpPr>
         <p:spPr>
           <a:xfrm>
-            <a:off x="4351834" y="2714129"/>
+            <a:off x="4351834" y="2935089"/>
             <a:ext cx="3488234" cy="6350"/>
           </a:xfrm>
           <a:prstGeom prst="rect">
@@ -31869,7 +31869,7 @@
         <p:spPr>
           <a:xfrm>
             <a:off x="4351834" y="1361678"/>
-            <a:ext cx="50800" cy="1358801"/>
+            <a:ext cx="50800" cy="1579761"/>
           </a:xfrm>
           <a:prstGeom prst="roundRect">
             <a:avLst>
@@ -32040,7 +32040,7 @@
                 <a:ea typeface="Malgun Gothic"/>
                 <a:cs typeface="Malgun Gothic"/>
               </a:rPr>
-              <a:t>Isaac Lab·legged_gym의 4족 예제 → 높이 지도 관측 추가 → 교사–학생 증류 한 번.</a:t>
+              <a:t>Isaac Lab·legged_gym의 4족 예제 → 높이 지도 관측 추가 → teacher–student 증류 한 번.</a:t>
             </a:r>
           </a:p>
         </p:txBody>
@@ -32054,11 +32054,11 @@
         <p:spPr>
           <a:xfrm>
             <a:off x="7992467" y="1361678"/>
-            <a:ext cx="3488234" cy="1358801"/>
+            <a:ext cx="3488234" cy="1579761"/>
           </a:xfrm>
           <a:prstGeom prst="roundRect">
             <a:avLst>
-              <a:gd name="adj" fmla="val 5607"/>
+              <a:gd name="adj" fmla="val 4823"/>
             </a:avLst>
           </a:prstGeom>
           <a:solidFill>
@@ -32114,7 +32114,7 @@
         <p:spPr>
           <a:xfrm>
             <a:off x="11474351" y="1361678"/>
-            <a:ext cx="6350" cy="1358801"/>
+            <a:ext cx="6350" cy="1579761"/>
           </a:xfrm>
           <a:prstGeom prst="rect">
             <a:avLst/>
@@ -32142,7 +32142,7 @@
         </p:nvSpPr>
         <p:spPr>
           <a:xfrm>
-            <a:off x="7992467" y="2714129"/>
+            <a:off x="7992467" y="2935089"/>
             <a:ext cx="3488234" cy="6350"/>
           </a:xfrm>
           <a:prstGeom prst="rect">
@@ -32172,7 +32172,7 @@
         <p:spPr>
           <a:xfrm>
             <a:off x="7992467" y="1361678"/>
-            <a:ext cx="50800" cy="1358801"/>
+            <a:ext cx="50800" cy="1579761"/>
           </a:xfrm>
           <a:prstGeom prst="roundRect">
             <a:avLst>
@@ -32357,7 +32357,7 @@
           <p:nvPr/>
         </p:nvGraphicFramePr>
         <p:xfrm>
-          <a:off x="711200" y="2898279"/>
+          <a:off x="711200" y="3119239"/>
           <a:ext cx="10769600" cy="1392302"/>
         </p:xfrm>
         <a:graphic>
@@ -32367,8 +32367,8 @@
                 <a:tableStyleId>{5C22544A-7EE6-4342-B048-85BDC9FD1C3A}</a:tableStyleId>
               </a:tblPr>
               <a:tblGrid>
-                <a:gridCol w="1720652"/>
-                <a:gridCol w="9048948"/>
+                <a:gridCol w="1563489"/>
+                <a:gridCol w="9206111"/>
               </a:tblGrid>
               <a:tr h="285477">
                 <a:tc>
@@ -32509,7 +32509,7 @@
                           <a:ea typeface="Malgun Gothic"/>
                           <a:cs typeface="Malgun Gothic"/>
                         </a:rPr>
-                        <a:t>교사–학생은 왜 RL 단독보다 쉬운가? 볼 곳을 고르면 왜 빨라지나?</a:t>
+                        <a:t>teacher–student는 왜 RL 단독보다 쉬운가? 볼 곳을 고르면 왜 빨라지나?</a:t>
                       </a:r>
                     </a:p>
                   </a:txBody>
@@ -33517,7 +33517,7 @@
                 <a:ea typeface="Malgun Gothic"/>
                 <a:cs typeface="Malgun Gothic"/>
               </a:rPr>
-              <a:t>특권 교사 → 배포 관측 학생, DAgger, 증류 가중은 천천히.</a:t>
+              <a:t>privileged 교사 → 배포 관측 학생, DAgger, 증류 손실 가중치는 천천히.</a:t>
             </a:r>
           </a:p>
         </p:txBody>
@@ -33979,7 +33979,7 @@
                 <a:ea typeface="Malgun Gothic"/>
                 <a:cs typeface="Malgun Gothic"/>
               </a:rPr>
-              <a:t>사람 데이터와 로봇 실행의 틈은 계획기·추종기·투영 중 하나에서.</a:t>
+              <a:t>사람 데이터와 로봇 실행의 틈은 플래너·추종기·투영 중 하나에서.</a:t>
             </a:r>
           </a:p>
         </p:txBody>
@@ -34333,7 +34333,7 @@
         </p:nvGraphicFramePr>
         <p:xfrm>
           <a:off x="711200" y="1361678"/>
-          <a:ext cx="10769601" cy="1669683"/>
+          <a:ext cx="10769600" cy="1669683"/>
         </p:xfrm>
         <a:graphic>
           <a:graphicData uri="http://schemas.openxmlformats.org/drawingml/2006/table">
@@ -34342,9 +34342,9 @@
                 <a:tableStyleId>{5C22544A-7EE6-4342-B048-85BDC9FD1C3A}</a:tableStyleId>
               </a:tblPr>
               <a:tblGrid>
-                <a:gridCol w="686991"/>
-                <a:gridCol w="7000677"/>
-                <a:gridCol w="3081933"/>
+                <a:gridCol w="665063"/>
+                <a:gridCol w="6777335"/>
+                <a:gridCol w="3327202"/>
               </a:tblGrid>
               <a:tr h="285477">
                 <a:tc>
@@ -34483,7 +34483,7 @@
                           <a:ea typeface="Malgun Gothic"/>
                           <a:cs typeface="Malgun Gothic"/>
                         </a:rPr>
-                        <a:t>균형과 디딤의 고전</a:t>
+                        <a:t>균형과 보행의 고전</a:t>
                       </a:r>
                     </a:p>
                   </a:txBody>
@@ -34705,7 +34705,7 @@
                           <a:ea typeface="Malgun Gothic"/>
                           <a:cs typeface="Malgun Gothic"/>
                         </a:rPr>
-                        <a:t>교사–학생 지형 보행</a:t>
+                        <a:t>teacher–student 지형 보행</a:t>
                       </a:r>
                     </a:p>
                   </a:txBody>
@@ -34779,7 +34779,7 @@
                           <a:ea typeface="Malgun Gothic"/>
                           <a:cs typeface="Malgun Gothic"/>
                         </a:rPr>
-                        <a:t>구동기 망으로 sim-to-real</a:t>
+                        <a:t>actuator network로 sim-to-real</a:t>
                       </a:r>
                     </a:p>
                   </a:txBody>
@@ -35317,7 +35317,7 @@
                 <a:ea typeface="Malgun Gothic"/>
                 <a:cs typeface="Malgun Gothic"/>
               </a:rPr>
-              <a:t>지지 영역, 고유감각, 강화학습, 모방이면 이 덱을 따라올 수 있다</a:t>
+              <a:t>지지 영역, proprioception, 강화학습, 모방이면 이 덱을 따라올 수 있다</a:t>
             </a:r>
           </a:p>
         </p:txBody>
@@ -35415,7 +35415,7 @@
                 <a:ea typeface="Malgun Gothic"/>
                 <a:cs typeface="Malgun Gothic"/>
               </a:rPr>
-              <a:t>위에서 본 발과 지지 영역(초록), 무게중심의 투영(빨강 ×). 지지 영역이 좁을수록 움직임으로 균형을 잡아야 한다</a:t>
+              <a:t>위에서 본 발과 지지 영역(support polygon, 초록), 무게중심의 투영(빨강 ×). 지지 영역이 좁을수록 움직임으로 균형을 잡아야 한다</a:t>
             </a:r>
           </a:p>
         </p:txBody>
@@ -35578,7 +35578,7 @@
         <p:spPr>
           <a:xfrm>
             <a:off x="927100" y="3831828"/>
-            <a:ext cx="1160562" cy="241300"/>
+            <a:ext cx="2053034" cy="241300"/>
           </a:xfrm>
           <a:prstGeom prst="roundRect">
             <a:avLst>
@@ -35609,7 +35609,7 @@
         <p:spPr>
           <a:xfrm>
             <a:off x="1016000" y="3857228"/>
-            <a:ext cx="1037645" cy="288925"/>
+            <a:ext cx="1956891" cy="288925"/>
           </a:xfrm>
           <a:prstGeom prst="rect">
             <a:avLst/>
@@ -35636,7 +35636,7 @@
                 <a:ea typeface="Malgun Gothic"/>
                 <a:cs typeface="Malgun Gothic"/>
               </a:rPr>
-              <a:t>고유감각 vs 외수용</a:t>
+              <a:t>proprioception vs exteroception</a:t>
             </a:r>
           </a:p>
         </p:txBody>
@@ -35939,7 +35939,7 @@
                 <a:ea typeface="Malgun Gothic"/>
                 <a:cs typeface="Malgun Gothic"/>
               </a:rPr>
-              <a:t>시뮬레이터 수천 개 병렬 환경에서 PPO로 관절 목표를 배우고, 무작위화로 실물에 옮긴다.</a:t>
+              <a:t>시뮬레이터 수천 개 병렬 환경에서 PPO로 관절 목표를 배우고, 도메인 랜덤화로 실물에 옮긴다.</a:t>
             </a:r>
           </a:p>
         </p:txBody>
@@ -36062,7 +36062,7 @@
         </p:nvGraphicFramePr>
         <p:xfrm>
           <a:off x="711200" y="1361678"/>
-          <a:ext cx="10769599" cy="2224445"/>
+          <a:ext cx="10769601" cy="2224445"/>
         </p:xfrm>
         <a:graphic>
           <a:graphicData uri="http://schemas.openxmlformats.org/drawingml/2006/table">
@@ -36071,10 +36071,10 @@
                 <a:tableStyleId>{5C22544A-7EE6-4342-B048-85BDC9FD1C3A}</a:tableStyleId>
               </a:tblPr>
               <a:tblGrid>
-                <a:gridCol w="2289175"/>
-                <a:gridCol w="2886174"/>
-                <a:gridCol w="2716212"/>
-                <a:gridCol w="2878038"/>
+                <a:gridCol w="2592388"/>
+                <a:gridCol w="2556570"/>
+                <a:gridCol w="3071217"/>
+                <a:gridCol w="2549426"/>
               </a:tblGrid>
               <a:tr h="285477">
                 <a:tc>
@@ -36390,7 +36390,7 @@
                           <a:ea typeface="Malgun Gothic"/>
                           <a:cs typeface="Malgun Gothic"/>
                         </a:rPr>
-                        <a:t> 전역 내비, 발 디딤</a:t>
+                        <a:t> 전역 내비, foothold 계획</a:t>
                       </a:r>
                     </a:p>
                   </a:txBody>
@@ -36425,7 +36425,7 @@
                           <a:ea typeface="Malgun Gothic"/>
                           <a:cs typeface="Malgun Gothic"/>
                         </a:rPr>
-                        <a:t> 고전 발자국 계획</a:t>
+                        <a:t> 고전 footstep 계획</a:t>
                       </a:r>
                     </a:p>
                   </a:txBody>
@@ -36822,7 +36822,7 @@
                           <a:ea typeface="Malgun Gothic"/>
                           <a:cs typeface="Malgun Gothic"/>
                         </a:rPr>
-                        <a:t>종단간 학습 플래너</a:t>
+                        <a:t>end-to-end 학습 플래너</a:t>
                       </a:r>
                     </a:p>
                   </a:txBody>
@@ -38459,7 +38459,7 @@
                 <a:ea typeface="Malgun Gothic"/>
                 <a:cs typeface="Malgun Gothic"/>
               </a:rPr>
-              <a:t>SLAM, 경로 계획(FAR), 탐사(TARE), 기본 자율(지형 분석, 충돌 회피, waypoint 추종)의 같은 층을 세 몸체에 쓴다. 바뀌는 것은 장애물 높이 문턱, 로봇 치수 같은 설정값뿐이다.</a:t>
+              <a:t>SLAM, 경로 계획(FAR), 탐사(TARE), 기본 자율(지형 분석, 충돌 회피, waypoint 추종)의 같은 층을 세 몸체에 쓴다. 바뀌는 것은 장애물 높이 임계값, 로봇 치수 같은 설정값뿐이다.</a:t>
             </a:r>
           </a:p>
         </p:txBody>
@@ -39272,7 +39272,7 @@
                 <a:ea typeface="Malgun Gothic"/>
                 <a:cs typeface="Malgun Gothic"/>
               </a:rPr>
-              <a:t>아래 층을 얼리고 위 층이 명령의 일부만 덮어쓰거나, 볼 곳까지 정한다</a:t>
+              <a:t>아래 층을 고정하고 위 층이 명령의 일부만 덮어쓰거나, 볼 곳까지 정한다</a:t>
             </a:r>
           </a:p>
         </p:txBody>
@@ -39534,7 +39534,7 @@
                 <a:ea typeface="Malgun Gothic"/>
                 <a:cs typeface="Malgun Gothic"/>
               </a:rPr>
-              <a:t>얼린 보행 정책 위의 순환 Planner</a:t>
+              <a:t>고정한(frozen) 보행 정책 위의 recurrent Planner</a:t>
             </a:r>
           </a:p>
         </p:txBody>
@@ -39976,7 +39976,7 @@
                 <a:ea typeface="Malgun Gothic"/>
                 <a:cs typeface="Malgun Gothic"/>
               </a:rPr>
-              <a:t>LP-NavOA (Fig. 1): 순환 Planner가 얼린 보행 정책의 진행 방향 명령만 덮어쓴다 — arXiv:2606.23249</a:t>
+              <a:t>LP-NavOA (Fig. 1): recurrent Planner가 고정한 보행 정책의 진행 방향 명령만 덮어쓴다 — arXiv:2606.23249</a:t>
             </a:r>
           </a:p>
         </p:txBody>
